--- a/Personality_Prediction_CV_Analysis.pptx
+++ b/Personality_Prediction_CV_Analysis.pptx
@@ -1595,7 +1595,7 @@
           </a:prstGeom>
           <a:extLst>
             <a:ext uri="{C572A759-6A51-4108-AA02-DFA0A04FC94B}">
-              <ma14:wrappingTextBoxFlag xmlns:ma14="http://schemas.microsoft.com/office/mac/drawingml/2011/main" xmlns="" val="0"/>
+              <ma14:wrappingTextBoxFlag xmlns="" xmlns:ma14="http://schemas.microsoft.com/office/mac/drawingml/2011/main" val="0"/>
             </a:ext>
           </a:extLst>
         </p:spPr>
@@ -1750,7 +1750,7 @@
           </a:prstGeom>
           <a:extLst>
             <a:ext uri="{C572A759-6A51-4108-AA02-DFA0A04FC94B}">
-              <ma14:wrappingTextBoxFlag xmlns:ma14="http://schemas.microsoft.com/office/mac/drawingml/2011/main" xmlns="" val="0"/>
+              <ma14:wrappingTextBoxFlag xmlns="" xmlns:ma14="http://schemas.microsoft.com/office/mac/drawingml/2011/main" val="0"/>
             </a:ext>
           </a:extLst>
         </p:spPr>
@@ -1825,7 +1825,7 @@
           </a:prstGeom>
           <a:extLst>
             <a:ext uri="{C572A759-6A51-4108-AA02-DFA0A04FC94B}">
-              <ma14:wrappingTextBoxFlag xmlns:ma14="http://schemas.microsoft.com/office/mac/drawingml/2011/main" xmlns="" val="0"/>
+              <ma14:wrappingTextBoxFlag xmlns="" xmlns:ma14="http://schemas.microsoft.com/office/mac/drawingml/2011/main" val="0"/>
             </a:ext>
           </a:extLst>
         </p:spPr>
@@ -2218,7 +2218,7 @@
         </p:nvSpPr>
         <p:spPr>
           <a:xfrm>
-            <a:off x="731520" y="4846320"/>
+            <a:off x="742278" y="4846320"/>
             <a:ext cx="8595360" cy="365760"/>
           </a:xfrm>
           <a:prstGeom prst="rect">
@@ -2231,16 +2231,13 @@
           <a:bodyPr wrap="square" lIns="0" tIns="0" rIns="0" bIns="0" rtlCol="0" anchor="t"/>
           <a:lstStyle/>
           <a:p>
-            <a:pPr marL="0" indent="0">
-              <a:buNone/>
-            </a:pPr>
             <a:r>
               <a:rPr lang="en-US" sz="1600" b="1" dirty="0">
                 <a:solidFill>
                   <a:schemeClr val="bg1"/>
                 </a:solidFill>
               </a:rPr>
-              <a:t>Thanh Hai Nguyen (619562) · Khanh Tran Nguyen (619956)</a:t>
+              <a:t>Thanh Hai Nguyen (619562) · Khanh Tran Nguyen (619956) · Cuong Do Manh (618655)</a:t>
             </a:r>
             <a:endParaRPr lang="en-US" sz="1600" dirty="0"/>
           </a:p>
@@ -3481,7 +3478,7 @@
           </a:prstGeom>
           <a:extLst>
             <a:ext uri="{C572A759-6A51-4108-AA02-DFA0A04FC94B}">
-              <ma14:wrappingTextBoxFlag xmlns:ma14="http://schemas.microsoft.com/office/mac/drawingml/2011/main" xmlns="" val="0"/>
+              <ma14:wrappingTextBoxFlag xmlns="" xmlns:ma14="http://schemas.microsoft.com/office/mac/drawingml/2011/main" val="0"/>
             </a:ext>
           </a:extLst>
         </p:spPr>
@@ -4207,7 +4204,7 @@
           </a:prstGeom>
           <a:extLst>
             <a:ext uri="{C572A759-6A51-4108-AA02-DFA0A04FC94B}">
-              <ma14:wrappingTextBoxFlag xmlns:ma14="http://schemas.microsoft.com/office/mac/drawingml/2011/main" xmlns="" val="0"/>
+              <ma14:wrappingTextBoxFlag xmlns="" xmlns:ma14="http://schemas.microsoft.com/office/mac/drawingml/2011/main" val="0"/>
             </a:ext>
           </a:extLst>
         </p:spPr>
@@ -4819,7 +4816,7 @@
           </a:prstGeom>
           <a:extLst>
             <a:ext uri="{C572A759-6A51-4108-AA02-DFA0A04FC94B}">
-              <ma14:wrappingTextBoxFlag xmlns:ma14="http://schemas.microsoft.com/office/mac/drawingml/2011/main" xmlns="" val="0"/>
+              <ma14:wrappingTextBoxFlag xmlns="" xmlns:ma14="http://schemas.microsoft.com/office/mac/drawingml/2011/main" val="0"/>
             </a:ext>
           </a:extLst>
         </p:spPr>
@@ -5589,7 +5586,7 @@
           </a:prstGeom>
           <a:extLst>
             <a:ext uri="{C572A759-6A51-4108-AA02-DFA0A04FC94B}">
-              <ma14:wrappingTextBoxFlag xmlns:ma14="http://schemas.microsoft.com/office/mac/drawingml/2011/main" xmlns="" val="0"/>
+              <ma14:wrappingTextBoxFlag xmlns="" xmlns:ma14="http://schemas.microsoft.com/office/mac/drawingml/2011/main" val="0"/>
             </a:ext>
           </a:extLst>
         </p:spPr>
@@ -6870,7 +6867,7 @@
           </a:prstGeom>
           <a:extLst>
             <a:ext uri="{C572A759-6A51-4108-AA02-DFA0A04FC94B}">
-              <ma14:wrappingTextBoxFlag xmlns:ma14="http://schemas.microsoft.com/office/mac/drawingml/2011/main" xmlns="" val="0"/>
+              <ma14:wrappingTextBoxFlag xmlns="" xmlns:ma14="http://schemas.microsoft.com/office/mac/drawingml/2011/main" val="0"/>
             </a:ext>
           </a:extLst>
         </p:spPr>
@@ -7591,7 +7588,7 @@
           </a:prstGeom>
           <a:extLst>
             <a:ext uri="{C572A759-6A51-4108-AA02-DFA0A04FC94B}">
-              <ma14:wrappingTextBoxFlag xmlns:ma14="http://schemas.microsoft.com/office/mac/drawingml/2011/main" xmlns="" val="0"/>
+              <ma14:wrappingTextBoxFlag xmlns="" xmlns:ma14="http://schemas.microsoft.com/office/mac/drawingml/2011/main" val="0"/>
             </a:ext>
           </a:extLst>
         </p:spPr>
@@ -8432,7 +8429,7 @@
           </a:prstGeom>
           <a:extLst>
             <a:ext uri="{C572A759-6A51-4108-AA02-DFA0A04FC94B}">
-              <ma14:wrappingTextBoxFlag xmlns:ma14="http://schemas.microsoft.com/office/mac/drawingml/2011/main" xmlns="" val="0"/>
+              <ma14:wrappingTextBoxFlag xmlns="" xmlns:ma14="http://schemas.microsoft.com/office/mac/drawingml/2011/main" val="0"/>
             </a:ext>
           </a:extLst>
         </p:spPr>
@@ -9469,7 +9466,7 @@
           </a:prstGeom>
           <a:extLst>
             <a:ext uri="{C572A759-6A51-4108-AA02-DFA0A04FC94B}">
-              <ma14:wrappingTextBoxFlag xmlns:ma14="http://schemas.microsoft.com/office/mac/drawingml/2011/main" xmlns="" val="0"/>
+              <ma14:wrappingTextBoxFlag xmlns="" xmlns:ma14="http://schemas.microsoft.com/office/mac/drawingml/2011/main" val="0"/>
             </a:ext>
           </a:extLst>
         </p:spPr>
@@ -10147,7 +10144,7 @@
           </a:prstGeom>
           <a:extLst>
             <a:ext uri="{C572A759-6A51-4108-AA02-DFA0A04FC94B}">
-              <ma14:wrappingTextBoxFlag xmlns:ma14="http://schemas.microsoft.com/office/mac/drawingml/2011/main" xmlns="" val="0"/>
+              <ma14:wrappingTextBoxFlag xmlns="" xmlns:ma14="http://schemas.microsoft.com/office/mac/drawingml/2011/main" val="0"/>
             </a:ext>
           </a:extLst>
         </p:spPr>
@@ -10791,7 +10788,7 @@
           </a:prstGeom>
           <a:extLst>
             <a:ext uri="{C572A759-6A51-4108-AA02-DFA0A04FC94B}">
-              <ma14:wrappingTextBoxFlag xmlns:ma14="http://schemas.microsoft.com/office/mac/drawingml/2011/main" xmlns="" val="0"/>
+              <ma14:wrappingTextBoxFlag xmlns="" xmlns:ma14="http://schemas.microsoft.com/office/mac/drawingml/2011/main" val="0"/>
             </a:ext>
           </a:extLst>
         </p:spPr>
@@ -12272,7 +12269,7 @@
           </a:prstGeom>
           <a:extLst>
             <a:ext uri="{C572A759-6A51-4108-AA02-DFA0A04FC94B}">
-              <ma14:wrappingTextBoxFlag xmlns:ma14="http://schemas.microsoft.com/office/mac/drawingml/2011/main" xmlns="" val="0"/>
+              <ma14:wrappingTextBoxFlag xmlns="" xmlns:ma14="http://schemas.microsoft.com/office/mac/drawingml/2011/main" val="0"/>
             </a:ext>
           </a:extLst>
         </p:spPr>
